--- a/classes/parte-9-forense-digital-y-respuesta-a-incidentes/220-caso-completo-de-respuesta-a-incidentes-end-to-end/clase-220-presentacion.pptx
+++ b/classes/parte-9-forense-digital-y-respuesta-a-incidentes/220-caso-completo-de-respuesta-a-incidentes-end-to-end/clase-220-presentacion.pptx
@@ -17,6 +17,11 @@
     <p:sldId id="265" r:id="rId16"/>
     <p:sldId id="266" r:id="rId17"/>
     <p:sldId id="267" r:id="rId18"/>
+    <p:sldId id="268" r:id="rId19"/>
+    <p:sldId id="269" r:id="rId20"/>
+    <p:sldId id="270" r:id="rId21"/>
+    <p:sldId id="271" r:id="rId22"/>
+    <p:sldId id="272" r:id="rId23"/>
   </p:sldIdLst>
   <p:sldSz cx="9144000" cy="6858000" type="screen4x3"/>
   <p:notesSz cx="6858000" cy="9144000"/>
@@ -3198,7 +3203,7 @@
                   <a:srgbClr val="0B3D2E"/>
                 </a:solidFill>
               </a:rPr>
-              <a:t>⚠️ Errores comunes</a:t>
+              <a:t>🧰 Herramientas y preparación</a:t>
             </a:r>
           </a:p>
         </p:txBody>
@@ -3236,67 +3241,37 @@
                   <a:srgbClr val="22282E"/>
                 </a:solidFill>
               </a:rPr>
-              <a:t>•  Conclusiones sin respaldo — Una sola fuente. Corrobora con memoria, disco y red.</a:t>
-            </a:r>
-          </a:p>
-          <a:p>
-            <a:pPr>
-              <a:spcAft>
-                <a:spcPts val="600"/>
-              </a:spcAft>
-            </a:pPr>
-            <a:r>
-              <a:rPr sz="1500">
-                <a:solidFill>
-                  <a:srgbClr val="22282E"/>
-                </a:solidFill>
-              </a:rPr>
-              <a:t>•  Perdiste la RAM — Contuviste apagando. Aísla por red primero.</a:t>
-            </a:r>
-          </a:p>
-          <a:p>
-            <a:pPr>
-              <a:spcAft>
-                <a:spcPts val="600"/>
-              </a:spcAft>
-            </a:pPr>
-            <a:r>
-              <a:rPr sz="1500">
-                <a:solidFill>
-                  <a:srgbClr val="22282E"/>
-                </a:solidFill>
-              </a:rPr>
-              <a:t>•  Timeline caótica — No la acotaste ni pivoteaste. Filtra por ventana y parte de eventos conocidos.</a:t>
-            </a:r>
-          </a:p>
-          <a:p>
-            <a:pPr>
-              <a:spcAft>
-                <a:spcPts val="600"/>
-              </a:spcAft>
-            </a:pPr>
-            <a:r>
-              <a:rPr sz="1500">
-                <a:solidFill>
-                  <a:srgbClr val="22282E"/>
-                </a:solidFill>
-              </a:rPr>
-              <a:t>•  Erradicación incompleta — Persistencia sin enumerar. Revísala toda antes de cerrar.</a:t>
-            </a:r>
-          </a:p>
-          <a:p>
-            <a:pPr>
-              <a:spcAft>
-                <a:spcPts val="600"/>
-              </a:spcAft>
-            </a:pPr>
-            <a:r>
-              <a:rPr sz="1500">
-                <a:solidFill>
-                  <a:srgbClr val="22282E"/>
-                </a:solidFill>
-              </a:rPr>
-              <a:t>•  Informe no reproducible — Faltan hashes/versiones. Documenta la metodología completa.</a:t>
+              <a:t>•  Todo el arsenal de la parte: FTK Imager/ewfacquire, Volatility 3, The Sleuth Kit/Autopsy, plaso/Timesketch, Wireshark/Zeek, Eric Zimmerman's Tools.</a:t>
+            </a:r>
+          </a:p>
+          <a:p>
+            <a:pPr>
+              <a:spcAft>
+                <a:spcPts val="600"/>
+              </a:spcAft>
+            </a:pPr>
+            <a:r>
+              <a:rPr sz="1500">
+                <a:solidFill>
+                  <a:srgbClr val="22282E"/>
+                </a:solidFill>
+              </a:rPr>
+              <a:t>•  Escenario: móntalo tú en un laboratorio aislado de VMs propias, o usa un dataset de entrenamiento DFIR público.</a:t>
+            </a:r>
+          </a:p>
+          <a:p>
+            <a:pPr>
+              <a:spcAft>
+                <a:spcPts val="600"/>
+              </a:spcAft>
+            </a:pPr>
+            <a:r>
+              <a:rPr sz="1500">
+                <a:solidFill>
+                  <a:srgbClr val="22282E"/>
+                </a:solidFill>
+              </a:rPr>
+              <a:t>•  Recuerda: cualquier malware se maneja solo en laboratorio aislado y desechable, con snapshots.</a:t>
             </a:r>
           </a:p>
         </p:txBody>
@@ -3347,7 +3322,7 @@
                   <a:srgbClr val="0B3D2E"/>
                 </a:solidFill>
               </a:rPr>
-              <a:t>❓ Preguntas frecuentes</a:t>
+              <a:t>🧪 Laboratorio guiado</a:t>
             </a:r>
           </a:p>
         </p:txBody>
@@ -3385,97 +3360,97 @@
                   <a:srgbClr val="22282E"/>
                 </a:solidFill>
               </a:rPr>
-              <a:t>•  ❓ ¿Por dónde empiezo un caso real?</a:t>
-            </a:r>
-          </a:p>
-          <a:p>
-            <a:pPr>
-              <a:spcAft>
-                <a:spcPts val="600"/>
-              </a:spcAft>
-            </a:pPr>
-            <a:r>
-              <a:rPr sz="1500">
-                <a:solidFill>
-                  <a:srgbClr val="22282E"/>
-                </a:solidFill>
-              </a:rPr>
-              <a:t>•  Por el triage: entiende la alerta, acota el alcance y decide contención preservando evidencia. Luego adquieres antes de analizar.</a:t>
-            </a:r>
-          </a:p>
-          <a:p>
-            <a:pPr>
-              <a:spcAft>
-                <a:spcPts val="600"/>
-              </a:spcAft>
-            </a:pPr>
-            <a:r>
-              <a:rPr sz="1500">
-                <a:solidFill>
-                  <a:srgbClr val="22282E"/>
-                </a:solidFill>
-              </a:rPr>
-              <a:t>•  ❓ ¿Qué fuente analizo primero?</a:t>
-            </a:r>
-          </a:p>
-          <a:p>
-            <a:pPr>
-              <a:spcAft>
-                <a:spcPts val="600"/>
-              </a:spcAft>
-            </a:pPr>
-            <a:r>
-              <a:rPr sz="1500">
-                <a:solidFill>
-                  <a:srgbClr val="22282E"/>
-                </a:solidFill>
-              </a:rPr>
-              <a:t>•  Sigue el orden de volatilidad: memoria y red en vivo primero, disco después. Pero correlaciona las tres al final.</a:t>
-            </a:r>
-          </a:p>
-          <a:p>
-            <a:pPr>
-              <a:spcAft>
-                <a:spcPts val="600"/>
-              </a:spcAft>
-            </a:pPr>
-            <a:r>
-              <a:rPr sz="1500">
-                <a:solidFill>
-                  <a:srgbClr val="22282E"/>
-                </a:solidFill>
-              </a:rPr>
-              <a:t>•  ❓ ¿Cómo sé que terminé?</a:t>
-            </a:r>
-          </a:p>
-          <a:p>
-            <a:pPr>
-              <a:spcAft>
-                <a:spcPts val="600"/>
-              </a:spcAft>
-            </a:pPr>
-            <a:r>
-              <a:rPr sz="1500">
-                <a:solidFill>
-                  <a:srgbClr val="22282E"/>
-                </a:solidFill>
-              </a:rPr>
-              <a:t>•  Cuando la narrativa se sostiene con evidencia concordante, la persistencia está erradicada y validada, y el informe permite a un tercero reproducir el análisis.</a:t>
-            </a:r>
-          </a:p>
-          <a:p>
-            <a:pPr>
-              <a:spcAft>
-                <a:spcPts val="600"/>
-              </a:spcAft>
-            </a:pPr>
-            <a:r>
-              <a:rPr sz="1500">
-                <a:solidFill>
-                  <a:srgbClr val="22282E"/>
-                </a:solidFill>
-              </a:rPr>
-              <a:t>•  ❓ ¿Y si el laboratorio tiene malware real?</a:t>
+              <a:t>•  Triage e identificación: revisa la alerta, clasifica severidad (clase 202) y define el alcance inicial. Decide aislar por red preservando RAM (clase 216).</a:t>
+            </a:r>
+          </a:p>
+          <a:p>
+            <a:pPr>
+              <a:spcAft>
+                <a:spcPts val="600"/>
+              </a:spcAft>
+            </a:pPr>
+            <a:r>
+              <a:rPr sz="1500">
+                <a:solidFill>
+                  <a:srgbClr val="22282E"/>
+                </a:solidFill>
+              </a:rPr>
+              <a:t>•  Adquisición:</a:t>
+            </a:r>
+          </a:p>
+          <a:p>
+            <a:pPr>
+              <a:spcAft>
+                <a:spcPts val="600"/>
+              </a:spcAft>
+            </a:pPr>
+            <a:r>
+              <a:rPr sz="1500">
+                <a:solidFill>
+                  <a:srgbClr val="22282E"/>
+                </a:solidFill>
+              </a:rPr>
+              <a:t>•  Volca la RAM (WinPmem) y el disco (FTK Imager → E01), con hashes y cadena de custodia (clases 201, 203, 207).</a:t>
+            </a:r>
+          </a:p>
+          <a:p>
+            <a:pPr>
+              <a:spcAft>
+                <a:spcPts val="600"/>
+              </a:spcAft>
+            </a:pPr>
+            <a:r>
+              <a:rPr sz="1500">
+                <a:solidFill>
+                  <a:srgbClr val="22282E"/>
+                </a:solidFill>
+              </a:rPr>
+              <a:t>•  Captura tráfico si el atacante sigue activo (clase 208).</a:t>
+            </a:r>
+          </a:p>
+          <a:p>
+            <a:pPr>
+              <a:spcAft>
+                <a:spcPts val="600"/>
+              </a:spcAft>
+            </a:pPr>
+            <a:r>
+              <a:rPr sz="1500">
+                <a:solidFill>
+                  <a:srgbClr val="22282E"/>
+                </a:solidFill>
+              </a:rPr>
+              <a:t>•  Análisis de memoria: con Volatility 3 halla el proceso malicioso, su inyección y su conexión C2:</a:t>
+            </a:r>
+          </a:p>
+          <a:p>
+            <a:pPr>
+              <a:spcAft>
+                <a:spcPts val="600"/>
+              </a:spcAft>
+            </a:pPr>
+            <a:r>
+              <a:rPr sz="1500">
+                <a:solidFill>
+                  <a:srgbClr val="22282E"/>
+                </a:solidFill>
+              </a:rPr>
+              <a:t>•  Análisis de disco: en Autopsy/TSK examina artefactos de ejecución y persistencia (clases 204, 205): Prefetch, ShimCache/AmCache, tareas programadas, claves Run.</a:t>
+            </a:r>
+          </a:p>
+          <a:p>
+            <a:pPr>
+              <a:spcAft>
+                <a:spcPts val="600"/>
+              </a:spcAft>
+            </a:pPr>
+            <a:r>
+              <a:rPr sz="1500">
+                <a:solidFill>
+                  <a:srgbClr val="22282E"/>
+                </a:solidFill>
+              </a:rPr>
+              <a:t>•  Análisis de red: en Zeek/Wireshark confirma el C2, el beaconing y qué se exfiltró (clase 208).</a:t>
             </a:r>
           </a:p>
         </p:txBody>
@@ -3526,7 +3501,7 @@
                   <a:srgbClr val="0B3D2E"/>
                 </a:solidFill>
               </a:rPr>
-              <a:t>🔗 Referencias</a:t>
+              <a:t>✍️ Ejercicios</a:t>
             </a:r>
           </a:p>
         </p:txBody>
@@ -3564,56 +3539,757 @@
                   <a:srgbClr val="22282E"/>
                 </a:solidFill>
               </a:rPr>
-              <a:t>•  NIST SP 800-61 Rev. 2: &lt;https://csrc.nist.gov/publications/detail/sp/800-61/rev-2/final&gt;</a:t>
-            </a:r>
-          </a:p>
-          <a:p>
-            <a:pPr>
-              <a:spcAft>
-                <a:spcPts val="600"/>
-              </a:spcAft>
-            </a:pPr>
-            <a:r>
-              <a:rPr sz="1500">
-                <a:solidFill>
-                  <a:srgbClr val="22282E"/>
-                </a:solidFill>
-              </a:rPr>
-              <a:t>•  Ligh, Case, Levy, Walters — The Art of Memory Forensics, Wiley 2014.</a:t>
-            </a:r>
-          </a:p>
-          <a:p>
-            <a:pPr>
-              <a:spcAft>
-                <a:spcPts val="600"/>
-              </a:spcAft>
-            </a:pPr>
-            <a:r>
-              <a:rPr sz="1500">
-                <a:solidFill>
-                  <a:srgbClr val="22282E"/>
-                </a:solidFill>
-              </a:rPr>
-              <a:t>•  Roberts &amp; Brown — Intelligence-Driven Incident Response, O'Reilly 2017.</a:t>
-            </a:r>
-          </a:p>
-          <a:p>
-            <a:pPr>
-              <a:spcAft>
-                <a:spcPts val="600"/>
-              </a:spcAft>
-            </a:pPr>
-            <a:r>
-              <a:rPr sz="1500">
-                <a:solidFill>
-                  <a:srgbClr val="22282E"/>
-                </a:solidFill>
-              </a:rPr>
-              <a:t>•  Autopsy / The Sleuth Kit: &lt;https://www.autopsy.com/&gt;</a:t>
-            </a:r>
-          </a:p>
-        </p:txBody>
-      </p:sp>
+              <a:t>•  Escribe la decisión de triage y su justificación de severidad.</a:t>
+            </a:r>
+          </a:p>
+          <a:p>
+            <a:pPr>
+              <a:spcAft>
+                <a:spcPts val="600"/>
+              </a:spcAft>
+            </a:pPr>
+            <a:r>
+              <a:rPr sz="1500">
+                <a:solidFill>
+                  <a:srgbClr val="22282E"/>
+                </a:solidFill>
+              </a:rPr>
+              <a:t>•  Correlaciona un hallazgo de memoria con uno de disco y uno de red.</a:t>
+            </a:r>
+          </a:p>
+          <a:p>
+            <a:pPr>
+              <a:spcAft>
+                <a:spcPts val="600"/>
+              </a:spcAft>
+            </a:pPr>
+            <a:r>
+              <a:rPr sz="1500">
+                <a:solidFill>
+                  <a:srgbClr val="22282E"/>
+                </a:solidFill>
+              </a:rPr>
+              <a:t>•  Construye la timeline maestra con al menos ocho eventos.</a:t>
+            </a:r>
+          </a:p>
+          <a:p>
+            <a:pPr>
+              <a:spcAft>
+                <a:spcPts val="600"/>
+              </a:spcAft>
+            </a:pPr>
+            <a:r>
+              <a:rPr sz="1500">
+                <a:solidFill>
+                  <a:srgbClr val="22282E"/>
+                </a:solidFill>
+              </a:rPr>
+              <a:t>•  Enumera las superficies de persistencia examinadas, los mecanismos hallados y lo que queda fuera de cobertura.</a:t>
+            </a:r>
+          </a:p>
+          <a:p>
+            <a:pPr>
+              <a:spcAft>
+                <a:spcPts val="600"/>
+              </a:spcAft>
+            </a:pPr>
+            <a:r>
+              <a:rPr sz="1500">
+                <a:solidFill>
+                  <a:srgbClr val="22282E"/>
+                </a:solidFill>
+              </a:rPr>
+              <a:t>•  Deriva cinco IOCs del incidente para búsqueda retroactiva.</a:t>
+            </a:r>
+          </a:p>
+          <a:p>
+            <a:pPr>
+              <a:spcAft>
+                <a:spcPts val="600"/>
+              </a:spcAft>
+            </a:pPr>
+            <a:r>
+              <a:rPr sz="1500">
+                <a:solidFill>
+                  <a:srgbClr val="22282E"/>
+                </a:solidFill>
+              </a:rPr>
+              <a:t>•  Formula tres acciones correctivas contra causas raíz.</a:t>
+            </a:r>
+          </a:p>
+        </p:txBody>
+      </p:sp>
+    </p:spTree>
+  </p:cSld>
+  <p:clrMapOvr>
+    <a:masterClrMapping/>
+  </p:clrMapOvr>
+</p:sld>
+</file>
+
+<file path=ppt/slides/slide13.xml><?xml version="1.0" encoding="utf-8"?>
+<p:sld xmlns:a="http://schemas.openxmlformats.org/drawingml/2006/main" xmlns:p="http://schemas.openxmlformats.org/presentationml/2006/main" xmlns:r="http://schemas.openxmlformats.org/officeDocument/2006/relationships">
+  <p:cSld>
+    <p:spTree>
+      <p:nvGrpSpPr>
+        <p:cNvPr id="1" name=""/>
+        <p:cNvGrpSpPr/>
+        <p:nvPr/>
+      </p:nvGrpSpPr>
+      <p:grpSpPr/>
+      <p:sp>
+        <p:nvSpPr>
+          <p:cNvPr id="2" name="TextBox 1"/>
+          <p:cNvSpPr txBox="1"/>
+          <p:nvPr/>
+        </p:nvSpPr>
+        <p:spPr>
+          <a:xfrm>
+            <a:off x="457200" y="320040"/>
+            <a:ext cx="8229600" cy="822960"/>
+          </a:xfrm>
+          <a:prstGeom prst="rect">
+            <a:avLst/>
+          </a:prstGeom>
+          <a:noFill/>
+        </p:spPr>
+        <p:txBody>
+          <a:bodyPr wrap="square">
+            <a:spAutoFit/>
+          </a:bodyPr>
+          <a:lstStyle/>
+          <a:p>
+            <a:r>
+              <a:rPr sz="2600" b="1">
+                <a:solidFill>
+                  <a:srgbClr val="0B3D2E"/>
+                </a:solidFill>
+              </a:rPr>
+              <a:t>📝 Reto verificable</a:t>
+            </a:r>
+          </a:p>
+        </p:txBody>
+      </p:sp>
+      <p:sp>
+        <p:nvSpPr>
+          <p:cNvPr id="3" name="TextBox 2"/>
+          <p:cNvSpPr txBox="1"/>
+          <p:nvPr/>
+        </p:nvSpPr>
+        <p:spPr>
+          <a:xfrm>
+            <a:off x="457200" y="1280160"/>
+            <a:ext cx="8229600" cy="4937760"/>
+          </a:xfrm>
+          <a:prstGeom prst="rect">
+            <a:avLst/>
+          </a:prstGeom>
+          <a:noFill/>
+        </p:spPr>
+        <p:txBody>
+          <a:bodyPr wrap="square">
+            <a:spAutoFit/>
+          </a:bodyPr>
+          <a:lstStyle/>
+          <a:p>
+            <a:pPr>
+              <a:spcAft>
+                <a:spcPts val="600"/>
+              </a:spcAft>
+            </a:pPr>
+            <a:r>
+              <a:rPr sz="1500">
+                <a:solidFill>
+                  <a:srgbClr val="22282E"/>
+                </a:solidFill>
+              </a:rPr>
+              <a:t>•  Resuelve el incidente completo y entrega el paquete final: cadena de custodia, hallazgos de memoria/disco/red correlacionados, timeline maestra, plan de contención/erradicación ejecutado, RCA e…</a:t>
+            </a:r>
+          </a:p>
+          <a:p>
+            <a:pPr>
+              <a:spcAft>
+                <a:spcPts val="600"/>
+              </a:spcAft>
+            </a:pPr>
+            <a:r>
+              <a:rPr sz="1500">
+                <a:solidFill>
+                  <a:srgbClr val="22282E"/>
+                </a:solidFill>
+              </a:rPr>
+              <a:t>•  Criterio de aceptación: la narrativa usa evidencia de memoria, disco y red —más identidad o nube cuando el escenario lo requiera— y explica coincidencias, contradicciones y fuentes sin visibilidad…</a:t>
+            </a:r>
+          </a:p>
+        </p:txBody>
+      </p:sp>
+    </p:spTree>
+  </p:cSld>
+  <p:clrMapOvr>
+    <a:masterClrMapping/>
+  </p:clrMapOvr>
+</p:sld>
+</file>
+
+<file path=ppt/slides/slide14.xml><?xml version="1.0" encoding="utf-8"?>
+<p:sld xmlns:a="http://schemas.openxmlformats.org/drawingml/2006/main" xmlns:p="http://schemas.openxmlformats.org/presentationml/2006/main" xmlns:r="http://schemas.openxmlformats.org/officeDocument/2006/relationships">
+  <p:cSld>
+    <p:spTree>
+      <p:nvGrpSpPr>
+        <p:cNvPr id="1" name=""/>
+        <p:cNvGrpSpPr/>
+        <p:nvPr/>
+      </p:nvGrpSpPr>
+      <p:grpSpPr/>
+      <p:sp>
+        <p:nvSpPr>
+          <p:cNvPr id="2" name="TextBox 1"/>
+          <p:cNvSpPr txBox="1"/>
+          <p:nvPr/>
+        </p:nvSpPr>
+        <p:spPr>
+          <a:xfrm>
+            <a:off x="457200" y="320040"/>
+            <a:ext cx="8229600" cy="822960"/>
+          </a:xfrm>
+          <a:prstGeom prst="rect">
+            <a:avLst/>
+          </a:prstGeom>
+          <a:noFill/>
+        </p:spPr>
+        <p:txBody>
+          <a:bodyPr wrap="square">
+            <a:spAutoFit/>
+          </a:bodyPr>
+          <a:lstStyle/>
+          <a:p>
+            <a:r>
+              <a:rPr sz="2600" b="1">
+                <a:solidFill>
+                  <a:srgbClr val="0B3D2E"/>
+                </a:solidFill>
+              </a:rPr>
+              <a:t>⚠️ Errores comunes</a:t>
+            </a:r>
+          </a:p>
+        </p:txBody>
+      </p:sp>
+      <p:sp>
+        <p:nvSpPr>
+          <p:cNvPr id="3" name="TextBox 2"/>
+          <p:cNvSpPr txBox="1"/>
+          <p:nvPr/>
+        </p:nvSpPr>
+        <p:spPr>
+          <a:xfrm>
+            <a:off x="457200" y="1280160"/>
+            <a:ext cx="8229600" cy="4937760"/>
+          </a:xfrm>
+          <a:prstGeom prst="rect">
+            <a:avLst/>
+          </a:prstGeom>
+          <a:noFill/>
+        </p:spPr>
+        <p:txBody>
+          <a:bodyPr wrap="square">
+            <a:spAutoFit/>
+          </a:bodyPr>
+          <a:lstStyle/>
+          <a:p>
+            <a:pPr>
+              <a:spcAft>
+                <a:spcPts val="600"/>
+              </a:spcAft>
+            </a:pPr>
+            <a:r>
+              <a:rPr sz="1500">
+                <a:solidFill>
+                  <a:srgbClr val="22282E"/>
+                </a:solidFill>
+              </a:rPr>
+              <a:t>•  Conclusiones sin respaldo — Una sola fuente. Corrobora con memoria, disco y red.</a:t>
+            </a:r>
+          </a:p>
+          <a:p>
+            <a:pPr>
+              <a:spcAft>
+                <a:spcPts val="600"/>
+              </a:spcAft>
+            </a:pPr>
+            <a:r>
+              <a:rPr sz="1500">
+                <a:solidFill>
+                  <a:srgbClr val="22282E"/>
+                </a:solidFill>
+              </a:rPr>
+              <a:t>•  Perdiste la RAM — Contuviste apagando. Aísla por red primero.</a:t>
+            </a:r>
+          </a:p>
+          <a:p>
+            <a:pPr>
+              <a:spcAft>
+                <a:spcPts val="600"/>
+              </a:spcAft>
+            </a:pPr>
+            <a:r>
+              <a:rPr sz="1500">
+                <a:solidFill>
+                  <a:srgbClr val="22282E"/>
+                </a:solidFill>
+              </a:rPr>
+              <a:t>•  Timeline caótica — No la acotaste ni pivoteaste. Filtra por ventana y parte de eventos conocidos.</a:t>
+            </a:r>
+          </a:p>
+          <a:p>
+            <a:pPr>
+              <a:spcAft>
+                <a:spcPts val="600"/>
+              </a:spcAft>
+            </a:pPr>
+            <a:r>
+              <a:rPr sz="1500">
+                <a:solidFill>
+                  <a:srgbClr val="22282E"/>
+                </a:solidFill>
+              </a:rPr>
+              <a:t>•  Erradicación incompleta — Persistencia sin enumerar. Revísala toda antes de cerrar.</a:t>
+            </a:r>
+          </a:p>
+          <a:p>
+            <a:pPr>
+              <a:spcAft>
+                <a:spcPts val="600"/>
+              </a:spcAft>
+            </a:pPr>
+            <a:r>
+              <a:rPr sz="1500">
+                <a:solidFill>
+                  <a:srgbClr val="22282E"/>
+                </a:solidFill>
+              </a:rPr>
+              <a:t>•  Informe no reproducible — Faltan hashes/versiones. Documenta la metodología completa.</a:t>
+            </a:r>
+          </a:p>
+        </p:txBody>
+      </p:sp>
+    </p:spTree>
+  </p:cSld>
+  <p:clrMapOvr>
+    <a:masterClrMapping/>
+  </p:clrMapOvr>
+</p:sld>
+</file>
+
+<file path=ppt/slides/slide15.xml><?xml version="1.0" encoding="utf-8"?>
+<p:sld xmlns:a="http://schemas.openxmlformats.org/drawingml/2006/main" xmlns:p="http://schemas.openxmlformats.org/presentationml/2006/main" xmlns:r="http://schemas.openxmlformats.org/officeDocument/2006/relationships">
+  <p:cSld>
+    <p:spTree>
+      <p:nvGrpSpPr>
+        <p:cNvPr id="1" name=""/>
+        <p:cNvGrpSpPr/>
+        <p:nvPr/>
+      </p:nvGrpSpPr>
+      <p:grpSpPr/>
+      <p:sp>
+        <p:nvSpPr>
+          <p:cNvPr id="2" name="TextBox 1"/>
+          <p:cNvSpPr txBox="1"/>
+          <p:nvPr/>
+        </p:nvSpPr>
+        <p:spPr>
+          <a:xfrm>
+            <a:off x="457200" y="320040"/>
+            <a:ext cx="8229600" cy="822960"/>
+          </a:xfrm>
+          <a:prstGeom prst="rect">
+            <a:avLst/>
+          </a:prstGeom>
+          <a:noFill/>
+        </p:spPr>
+        <p:txBody>
+          <a:bodyPr wrap="square">
+            <a:spAutoFit/>
+          </a:bodyPr>
+          <a:lstStyle/>
+          <a:p>
+            <a:r>
+              <a:rPr sz="2600" b="1">
+                <a:solidFill>
+                  <a:srgbClr val="0B3D2E"/>
+                </a:solidFill>
+              </a:rPr>
+              <a:t>❓ Preguntas frecuentes</a:t>
+            </a:r>
+          </a:p>
+        </p:txBody>
+      </p:sp>
+      <p:sp>
+        <p:nvSpPr>
+          <p:cNvPr id="3" name="TextBox 2"/>
+          <p:cNvSpPr txBox="1"/>
+          <p:nvPr/>
+        </p:nvSpPr>
+        <p:spPr>
+          <a:xfrm>
+            <a:off x="457200" y="1280160"/>
+            <a:ext cx="8229600" cy="4937760"/>
+          </a:xfrm>
+          <a:prstGeom prst="rect">
+            <a:avLst/>
+          </a:prstGeom>
+          <a:noFill/>
+        </p:spPr>
+        <p:txBody>
+          <a:bodyPr wrap="square">
+            <a:spAutoFit/>
+          </a:bodyPr>
+          <a:lstStyle/>
+          <a:p>
+            <a:pPr>
+              <a:spcAft>
+                <a:spcPts val="600"/>
+              </a:spcAft>
+            </a:pPr>
+            <a:r>
+              <a:rPr sz="1500">
+                <a:solidFill>
+                  <a:srgbClr val="22282E"/>
+                </a:solidFill>
+              </a:rPr>
+              <a:t>•  ❓ ¿Por dónde empiezo un caso real?</a:t>
+            </a:r>
+          </a:p>
+          <a:p>
+            <a:pPr>
+              <a:spcAft>
+                <a:spcPts val="600"/>
+              </a:spcAft>
+            </a:pPr>
+            <a:r>
+              <a:rPr sz="1500">
+                <a:solidFill>
+                  <a:srgbClr val="22282E"/>
+                </a:solidFill>
+              </a:rPr>
+              <a:t>•  Por el triage: entiende la alerta, acota el alcance y decide contención preservando evidencia. Luego adquieres antes de analizar.</a:t>
+            </a:r>
+          </a:p>
+          <a:p>
+            <a:pPr>
+              <a:spcAft>
+                <a:spcPts val="600"/>
+              </a:spcAft>
+            </a:pPr>
+            <a:r>
+              <a:rPr sz="1500">
+                <a:solidFill>
+                  <a:srgbClr val="22282E"/>
+                </a:solidFill>
+              </a:rPr>
+              <a:t>•  ❓ ¿Qué fuente analizo primero?</a:t>
+            </a:r>
+          </a:p>
+          <a:p>
+            <a:pPr>
+              <a:spcAft>
+                <a:spcPts val="600"/>
+              </a:spcAft>
+            </a:pPr>
+            <a:r>
+              <a:rPr sz="1500">
+                <a:solidFill>
+                  <a:srgbClr val="22282E"/>
+                </a:solidFill>
+              </a:rPr>
+              <a:t>•  Sigue el orden de volatilidad: memoria y red en vivo primero, disco después. Pero correlaciona las tres al final.</a:t>
+            </a:r>
+          </a:p>
+          <a:p>
+            <a:pPr>
+              <a:spcAft>
+                <a:spcPts val="600"/>
+              </a:spcAft>
+            </a:pPr>
+            <a:r>
+              <a:rPr sz="1500">
+                <a:solidFill>
+                  <a:srgbClr val="22282E"/>
+                </a:solidFill>
+              </a:rPr>
+              <a:t>•  ❓ ¿Cómo sé que terminé?</a:t>
+            </a:r>
+          </a:p>
+          <a:p>
+            <a:pPr>
+              <a:spcAft>
+                <a:spcPts val="600"/>
+              </a:spcAft>
+            </a:pPr>
+            <a:r>
+              <a:rPr sz="1500">
+                <a:solidFill>
+                  <a:srgbClr val="22282E"/>
+                </a:solidFill>
+              </a:rPr>
+              <a:t>•  Cuando la narrativa se sostiene con evidencia concordante, la persistencia está erradicada y validada, y el informe permite a un tercero reproducir el análisis.</a:t>
+            </a:r>
+          </a:p>
+          <a:p>
+            <a:pPr>
+              <a:spcAft>
+                <a:spcPts val="600"/>
+              </a:spcAft>
+            </a:pPr>
+            <a:r>
+              <a:rPr sz="1500">
+                <a:solidFill>
+                  <a:srgbClr val="22282E"/>
+                </a:solidFill>
+              </a:rPr>
+              <a:t>•  ❓ ¿Y si el laboratorio tiene malware real?</a:t>
+            </a:r>
+          </a:p>
+        </p:txBody>
+      </p:sp>
+    </p:spTree>
+  </p:cSld>
+  <p:clrMapOvr>
+    <a:masterClrMapping/>
+  </p:clrMapOvr>
+</p:sld>
+</file>
+
+<file path=ppt/slides/slide16.xml><?xml version="1.0" encoding="utf-8"?>
+<p:sld xmlns:a="http://schemas.openxmlformats.org/drawingml/2006/main" xmlns:p="http://schemas.openxmlformats.org/presentationml/2006/main" xmlns:r="http://schemas.openxmlformats.org/officeDocument/2006/relationships">
+  <p:cSld>
+    <p:spTree>
+      <p:nvGrpSpPr>
+        <p:cNvPr id="1" name=""/>
+        <p:cNvGrpSpPr/>
+        <p:nvPr/>
+      </p:nvGrpSpPr>
+      <p:grpSpPr/>
+      <p:sp>
+        <p:nvSpPr>
+          <p:cNvPr id="2" name="TextBox 1"/>
+          <p:cNvSpPr txBox="1"/>
+          <p:nvPr/>
+        </p:nvSpPr>
+        <p:spPr>
+          <a:xfrm>
+            <a:off x="457200" y="320040"/>
+            <a:ext cx="8229600" cy="822960"/>
+          </a:xfrm>
+          <a:prstGeom prst="rect">
+            <a:avLst/>
+          </a:prstGeom>
+          <a:noFill/>
+        </p:spPr>
+        <p:txBody>
+          <a:bodyPr wrap="square">
+            <a:spAutoFit/>
+          </a:bodyPr>
+          <a:lstStyle/>
+          <a:p>
+            <a:r>
+              <a:rPr sz="2600" b="1">
+                <a:solidFill>
+                  <a:srgbClr val="0B3D2E"/>
+                </a:solidFill>
+              </a:rPr>
+              <a:t>🔗 Referencias verificables y alcance</a:t>
+            </a:r>
+          </a:p>
+        </p:txBody>
+      </p:sp>
+      <p:sp>
+        <p:nvSpPr>
+          <p:cNvPr id="3" name="TextBox 2"/>
+          <p:cNvSpPr txBox="1"/>
+          <p:nvPr/>
+        </p:nvSpPr>
+        <p:spPr>
+          <a:xfrm>
+            <a:off x="457200" y="1280160"/>
+            <a:ext cx="8229600" cy="4937760"/>
+          </a:xfrm>
+          <a:prstGeom prst="rect">
+            <a:avLst/>
+          </a:prstGeom>
+          <a:noFill/>
+        </p:spPr>
+        <p:txBody>
+          <a:bodyPr wrap="square">
+            <a:spAutoFit/>
+          </a:bodyPr>
+          <a:lstStyle/>
+          <a:p>
+            <a:pPr>
+              <a:spcAft>
+                <a:spcPts val="600"/>
+              </a:spcAft>
+            </a:pPr>
+            <a:r>
+              <a:rPr sz="1500">
+                <a:solidFill>
+                  <a:srgbClr val="22282E"/>
+                </a:solidFill>
+              </a:rPr>
+              <a:t>•  NIST SP 800-61 Rev. 3: &lt;https://doi.org/10.6028/NIST.SP.800-61r3&gt; — marco vigente para integrar respuesta y gestión de riesgo.</a:t>
+            </a:r>
+          </a:p>
+          <a:p>
+            <a:pPr>
+              <a:spcAft>
+                <a:spcPts val="600"/>
+              </a:spcAft>
+            </a:pPr>
+            <a:r>
+              <a:rPr sz="1500">
+                <a:solidFill>
+                  <a:srgbClr val="22282E"/>
+                </a:solidFill>
+              </a:rPr>
+              <a:t>•  NIST SP 800-86: &lt;https://doi.org/10.6028/NIST.SP.800-86&gt; — proceso de recolección, examen, análisis y reporte desde una perspectiva de TI.</a:t>
+            </a:r>
+          </a:p>
+          <a:p>
+            <a:pPr>
+              <a:spcAft>
+                <a:spcPts val="600"/>
+              </a:spcAft>
+            </a:pPr>
+            <a:r>
+              <a:rPr sz="1500">
+                <a:solidFill>
+                  <a:srgbClr val="22282E"/>
+                </a:solidFill>
+              </a:rPr>
+              <a:t>•  RFC 3227 / BCP 55: &lt;https://www.rfc-editor.org/info/rfc3227/&gt; — principios de volatilidad, documentación, copias y verificación durante recolección.</a:t>
+            </a:r>
+          </a:p>
+          <a:p>
+            <a:pPr>
+              <a:spcAft>
+                <a:spcPts val="600"/>
+              </a:spcAft>
+            </a:pPr>
+            <a:r>
+              <a:rPr sz="1500">
+                <a:solidFill>
+                  <a:srgbClr val="22282E"/>
+                </a:solidFill>
+              </a:rPr>
+              <a:t>•  Volatility 3 Documentation: &lt;https://volatility3.readthedocs.io/en/latest/&gt; — referencia oficial para análisis de memoria; Volatility analiza adquisiciones, no realiza por sí mismo la captura de RAM.</a:t>
+            </a:r>
+          </a:p>
+          <a:p>
+            <a:pPr>
+              <a:spcAft>
+                <a:spcPts val="600"/>
+              </a:spcAft>
+            </a:pPr>
+            <a:r>
+              <a:rPr sz="1500">
+                <a:solidFill>
+                  <a:srgbClr val="22282E"/>
+                </a:solidFill>
+              </a:rPr>
+              <a:t>•  The Sleuth Kit documentation: &lt;https://www.sleuthkit.org/sleuthkit/docs.php&gt; — herramientas y conceptos de filesystem para validar pasos del caso.</a:t>
+            </a:r>
+          </a:p>
+          <a:p>
+            <a:pPr>
+              <a:spcAft>
+                <a:spcPts val="600"/>
+              </a:spcAft>
+            </a:pPr>
+            <a:r>
+              <a:rPr sz="1500">
+                <a:solidFill>
+                  <a:srgbClr val="22282E"/>
+                </a:solidFill>
+              </a:rPr>
+              <a:t>•  Plaso User’s Guide: &lt;https://plaso.readthedocs.io/en/latest/sources/user/Users-Guide.html&gt; — flujo reproducible para extracción temporal y almacenamiento intermedio.</a:t>
+            </a:r>
+          </a:p>
+        </p:txBody>
+      </p:sp>
+    </p:spTree>
+  </p:cSld>
+  <p:clrMapOvr>
+    <a:masterClrMapping/>
+  </p:clrMapOvr>
+</p:sld>
+</file>
+
+<file path=ppt/slides/slide17.xml><?xml version="1.0" encoding="utf-8"?>
+<p:sld xmlns:a="http://schemas.openxmlformats.org/drawingml/2006/main" xmlns:p="http://schemas.openxmlformats.org/presentationml/2006/main" xmlns:r="http://schemas.openxmlformats.org/officeDocument/2006/relationships">
+  <p:cSld>
+    <p:spTree>
+      <p:nvGrpSpPr>
+        <p:cNvPr id="1" name=""/>
+        <p:cNvGrpSpPr/>
+        <p:nvPr/>
+      </p:nvGrpSpPr>
+      <p:grpSpPr/>
+      <p:sp>
+        <p:nvSpPr>
+          <p:cNvPr id="2" name="TextBox 1"/>
+          <p:cNvSpPr txBox="1"/>
+          <p:nvPr/>
+        </p:nvSpPr>
+        <p:spPr>
+          <a:xfrm>
+            <a:off x="457200" y="274320"/>
+            <a:ext cx="8229600" cy="640080"/>
+          </a:xfrm>
+          <a:prstGeom prst="rect">
+            <a:avLst/>
+          </a:prstGeom>
+          <a:noFill/>
+        </p:spPr>
+        <p:txBody>
+          <a:bodyPr wrap="square">
+            <a:spAutoFit/>
+          </a:bodyPr>
+          <a:lstStyle/>
+          <a:p>
+            <a:r>
+              <a:rPr sz="2200" b="1">
+                <a:solidFill>
+                  <a:srgbClr val="0B3D2E"/>
+                </a:solidFill>
+              </a:rPr>
+              <a:t>Diagrama de la clase</a:t>
+            </a:r>
+          </a:p>
+        </p:txBody>
+      </p:sp>
+      <p:pic>
+        <p:nvPicPr>
+          <p:cNvPr id="3" name="Picture 2" descr="2f8a553a4980839f.png"/>
+          <p:cNvPicPr>
+            <a:picLocks noChangeAspect="1"/>
+          </p:cNvPicPr>
+          <p:nvPr/>
+        </p:nvPicPr>
+        <p:blipFill>
+          <a:blip r:embed="rId2"/>
+          <a:stretch>
+            <a:fillRect/>
+          </a:stretch>
+        </p:blipFill>
+        <p:spPr>
+          <a:xfrm>
+            <a:off x="457200" y="3616452"/>
+            <a:ext cx="8229600" cy="265176"/>
+          </a:xfrm>
+          <a:prstGeom prst="rect">
+            <a:avLst/>
+          </a:prstGeom>
+        </p:spPr>
+      </p:pic>
     </p:spTree>
   </p:cSld>
   <p:clrMapOvr>
@@ -3698,7 +4374,7 @@
                   <a:srgbClr val="22282E"/>
                 </a:solidFill>
               </a:rPr>
-              <a:t>•  Integrar todo lo aprendido en la parte resolviendo un incidente de principio a fin: desde la alerta inicial hasta el informe y las lecciones aprendidas. Este es el proyecto capstone: adquisición, análisis multi-fuente, timeline, contención, erradicación, RCA e informe, ejecutados como un caso real y coherente.</a:t>
+              <a:t>•  Integrar todo lo aprendido en la parte resolviendo un incidente de principio a fin: desde la alerta inicial hasta el informe y las lecciones aprendidas. Este es el proyecto capstone: adquisición…</a:t>
             </a:r>
           </a:p>
         </p:txBody>
@@ -4092,7 +4768,7 @@
                   <a:srgbClr val="0B3D2E"/>
                 </a:solidFill>
               </a:rPr>
-              <a:t>📖 Definiciones y características</a:t>
+              <a:t>🧠 Explicación en profundidad</a:t>
             </a:r>
           </a:p>
         </p:txBody>
@@ -4130,97 +4806,97 @@
                   <a:srgbClr val="22282E"/>
                 </a:solidFill>
               </a:rPr>
-              <a:t>•  Capstone: proyecto integrador que ejercita todas las competencias. Característica: evalúa el criterio, no solo la técnica.</a:t>
-            </a:r>
-          </a:p>
-          <a:p>
-            <a:pPr>
-              <a:spcAft>
-                <a:spcPts val="600"/>
-              </a:spcAft>
-            </a:pPr>
-            <a:r>
-              <a:rPr sz="1500">
-                <a:solidFill>
-                  <a:srgbClr val="22282E"/>
-                </a:solidFill>
-              </a:rPr>
-              <a:t>•  Triage: evaluación rápida para priorizar y decidir. Característica: define el rumbo con información incompleta.</a:t>
-            </a:r>
-          </a:p>
-          <a:p>
-            <a:pPr>
-              <a:spcAft>
-                <a:spcPts val="600"/>
-              </a:spcAft>
-            </a:pPr>
-            <a:r>
-              <a:rPr sz="1500">
-                <a:solidFill>
-                  <a:srgbClr val="22282E"/>
-                </a:solidFill>
-              </a:rPr>
-              <a:t>•  Correlación multi-fuente: unir disco, memoria y red en una historia. Característica: cada fuente confirma o refuta a las otras.</a:t>
-            </a:r>
-          </a:p>
-          <a:p>
-            <a:pPr>
-              <a:spcAft>
-                <a:spcPts val="600"/>
-              </a:spcAft>
-            </a:pPr>
-            <a:r>
-              <a:rPr sz="1500">
-                <a:solidFill>
-                  <a:srgbClr val="22282E"/>
-                </a:solidFill>
-              </a:rPr>
-              <a:t>•  Narrativa del incidente: relato cronológico y causal del ataque. Característica: debe sostenerse solo con evidencia.</a:t>
-            </a:r>
-          </a:p>
-          <a:p>
-            <a:pPr>
-              <a:spcAft>
-                <a:spcPts val="600"/>
-              </a:spcAft>
-            </a:pPr>
-            <a:r>
-              <a:rPr sz="1500">
-                <a:solidFill>
-                  <a:srgbClr val="22282E"/>
-                </a:solidFill>
-              </a:rPr>
-              <a:t>•  IOC/IOA: indicadores de compromiso/ataque. Característica: alimentan detección y búsqueda retroactiva.</a:t>
-            </a:r>
-          </a:p>
-          <a:p>
-            <a:pPr>
-              <a:spcAft>
-                <a:spcPts val="600"/>
-              </a:spcAft>
-            </a:pPr>
-            <a:r>
-              <a:rPr sz="1500">
-                <a:solidFill>
-                  <a:srgbClr val="22282E"/>
-                </a:solidFill>
-              </a:rPr>
-              <a:t>•  Contención con preservación: frenar sin destruir evidencia. Característica: el equilibrio central de DFIR.</a:t>
-            </a:r>
-          </a:p>
-          <a:p>
-            <a:pPr>
-              <a:spcAft>
-                <a:spcPts val="600"/>
-              </a:spcAft>
-            </a:pPr>
-            <a:r>
-              <a:rPr sz="1500">
-                <a:solidFill>
-                  <a:srgbClr val="22282E"/>
-                </a:solidFill>
-              </a:rPr>
-              <a:t>•  Cierre: declaración formal de incidente resuelto. Característica: exige criterios objetivos cumplidos.</a:t>
+              <a:t>•  El caso final integra SOC, respuesta y forense sin asumir una historia prefabricada. Se parte de una alerta con confianza limitada, se preservan fuentes según volatilidad, se mantiene un registro de…</a:t>
+            </a:r>
+          </a:p>
+          <a:p>
+            <a:pPr>
+              <a:spcAft>
+                <a:spcPts val="600"/>
+              </a:spcAft>
+            </a:pPr>
+            <a:r>
+              <a:rPr sz="1500">
+                <a:solidFill>
+                  <a:srgbClr val="22282E"/>
+                </a:solidFill>
+              </a:rPr>
+              <a:t>•  La bitácora separa hora del incidente, hora conocida y hora de decisión; así puede evaluarse la razonabilidad con información disponible entonces. El informe distingue hechos, inferencias y…</a:t>
+            </a:r>
+          </a:p>
+          <a:p>
+            <a:pPr>
+              <a:spcAft>
+                <a:spcPts val="600"/>
+              </a:spcAft>
+            </a:pPr>
+            <a:r>
+              <a:rPr sz="1500">
+                <a:solidFill>
+                  <a:srgbClr val="22282E"/>
+                </a:solidFill>
+              </a:rPr>
+              <a:t>•  La alerta inicial no contiene la historia. El equipo registra quién la produjo, lógica, alcance, tiempo y datos disponibles; formula hipótesis competidoras y define qué observación las apoyaría o…</a:t>
+            </a:r>
+          </a:p>
+          <a:p>
+            <a:pPr>
+              <a:spcAft>
+                <a:spcPts val="600"/>
+              </a:spcAft>
+            </a:pPr>
+            <a:r>
+              <a:rPr sz="1500">
+                <a:solidFill>
+                  <a:srgbClr val="22282E"/>
+                </a:solidFill>
+              </a:rPr>
+              <a:t>•  El alcance es provisional y se versiona. Usuarios, hosts, IP, dominios, cuentas cloud y periodos se agregan por relación evidenciada, no por intuición. Cada ampliación anota origen y pregunta…</a:t>
+            </a:r>
+          </a:p>
+          <a:p>
+            <a:pPr>
+              <a:spcAft>
+                <a:spcPts val="600"/>
+              </a:spcAft>
+            </a:pPr>
+            <a:r>
+              <a:rPr sz="1500">
+                <a:solidFill>
+                  <a:srgbClr val="22282E"/>
+                </a:solidFill>
+              </a:rPr>
+              <a:t>•  La adquisición sigue una estrategia documentada: memoria y conexiones si aportan valor y son viables; logs remotos, identidad y nube antes de retención o cambios; discos y artefactos con hashes y…</a:t>
+            </a:r>
+          </a:p>
+          <a:p>
+            <a:pPr>
+              <a:spcAft>
+                <a:spcPts val="600"/>
+              </a:spcAft>
+            </a:pPr>
+            <a:r>
+              <a:rPr sz="1500">
+                <a:solidFill>
+                  <a:srgbClr val="22282E"/>
+                </a:solidFill>
+              </a:rPr>
+              <a:t>•  Memoria puede mostrar proceso y conexión; disco, archivo y persistencia; red, transferencia; identidad, sesión y privilegio. La correlación no obliga a que tres fuentes «concuerden»: una fuente puede…</a:t>
+            </a:r>
+          </a:p>
+          <a:p>
+            <a:pPr>
+              <a:spcAft>
+                <a:spcPts val="600"/>
+              </a:spcAft>
+            </a:pPr>
+            <a:r>
+              <a:rPr sz="1500">
+                <a:solidFill>
+                  <a:srgbClr val="22282E"/>
+                </a:solidFill>
+              </a:rPr>
+              <a:t>•  El registro de decisiones incluye hora conocida, alternativas, autoridad, impacto esperado y reversión. Así se distingue una decisión razonable con información limitada de una explicación…</a:t>
             </a:r>
           </a:p>
         </p:txBody>
@@ -4271,7 +4947,7 @@
                   <a:srgbClr val="0B3D2E"/>
                 </a:solidFill>
               </a:rPr>
-              <a:t>🧰 Herramientas y preparación</a:t>
+              <a:t>📔 Glosario</a:t>
             </a:r>
           </a:p>
         </p:txBody>
@@ -4309,37 +4985,97 @@
                   <a:srgbClr val="22282E"/>
                 </a:solidFill>
               </a:rPr>
-              <a:t>•  Todo el arsenal de la parte: FTK Imager/ewfacquire, Volatility 3, The Sleuth Kit/Autopsy, plaso/Timesketch, Wireshark/Zeek, Eric Zimmerman's Tools.</a:t>
-            </a:r>
-          </a:p>
-          <a:p>
-            <a:pPr>
-              <a:spcAft>
-                <a:spcPts val="600"/>
-              </a:spcAft>
-            </a:pPr>
-            <a:r>
-              <a:rPr sz="1500">
-                <a:solidFill>
-                  <a:srgbClr val="22282E"/>
-                </a:solidFill>
-              </a:rPr>
-              <a:t>•  Escenario: móntalo tú en un laboratorio aislado de VMs propias, o usa un dataset de entrenamiento DFIR público.</a:t>
-            </a:r>
-          </a:p>
-          <a:p>
-            <a:pPr>
-              <a:spcAft>
-                <a:spcPts val="600"/>
-              </a:spcAft>
-            </a:pPr>
-            <a:r>
-              <a:rPr sz="1500">
-                <a:solidFill>
-                  <a:srgbClr val="22282E"/>
-                </a:solidFill>
-              </a:rPr>
-              <a:t>•  Recuerda: cualquier malware se maneja solo en laboratorio aislado y desechable, con snapshots.</a:t>
+              <a:t>•  Case log: registro cronológico de acciones y decisiones.</a:t>
+            </a:r>
+          </a:p>
+          <a:p>
+            <a:pPr>
+              <a:spcAft>
+                <a:spcPts val="600"/>
+              </a:spcAft>
+            </a:pPr>
+            <a:r>
+              <a:rPr sz="1500">
+                <a:solidFill>
+                  <a:srgbClr val="22282E"/>
+                </a:solidFill>
+              </a:rPr>
+              <a:t>•  Scope: entidades y periodos potencialmente afectados.</a:t>
+            </a:r>
+          </a:p>
+          <a:p>
+            <a:pPr>
+              <a:spcAft>
+                <a:spcPts val="600"/>
+              </a:spcAft>
+            </a:pPr>
+            <a:r>
+              <a:rPr sz="1500">
+                <a:solidFill>
+                  <a:srgbClr val="22282E"/>
+                </a:solidFill>
+              </a:rPr>
+              <a:t>•  Evidence matrix: relación entre preguntas y fuentes.</a:t>
+            </a:r>
+          </a:p>
+          <a:p>
+            <a:pPr>
+              <a:spcAft>
+                <a:spcPts val="600"/>
+              </a:spcAft>
+            </a:pPr>
+            <a:r>
+              <a:rPr sz="1500">
+                <a:solidFill>
+                  <a:srgbClr val="22282E"/>
+                </a:solidFill>
+              </a:rPr>
+              <a:t>•  Decision log: razón, autoridad y resultado de cada decisión.</a:t>
+            </a:r>
+          </a:p>
+          <a:p>
+            <a:pPr>
+              <a:spcAft>
+                <a:spcPts val="600"/>
+              </a:spcAft>
+            </a:pPr>
+            <a:r>
+              <a:rPr sz="1500">
+                <a:solidFill>
+                  <a:srgbClr val="22282E"/>
+                </a:solidFill>
+              </a:rPr>
+              <a:t>•  Unknown: aspecto que la evidencia no resuelve.</a:t>
+            </a:r>
+          </a:p>
+          <a:p>
+            <a:pPr>
+              <a:spcAft>
+                <a:spcPts val="600"/>
+              </a:spcAft>
+            </a:pPr>
+            <a:r>
+              <a:rPr sz="1500">
+                <a:solidFill>
+                  <a:srgbClr val="22282E"/>
+                </a:solidFill>
+              </a:rPr>
+              <a:t>•  Exit criteria: condiciones para cerrar respuesta.</a:t>
+            </a:r>
+          </a:p>
+          <a:p>
+            <a:pPr>
+              <a:spcAft>
+                <a:spcPts val="600"/>
+              </a:spcAft>
+            </a:pPr>
+            <a:r>
+              <a:rPr sz="1500">
+                <a:solidFill>
+                  <a:srgbClr val="22282E"/>
+                </a:solidFill>
+              </a:rPr>
+              <a:t>•  Regression detection: analítica que verifica una mejora posterior.</a:t>
             </a:r>
           </a:p>
         </p:txBody>
@@ -4390,7 +5126,7 @@
                   <a:srgbClr val="0B3D2E"/>
                 </a:solidFill>
               </a:rPr>
-              <a:t>🧪 Laboratorio guiado</a:t>
+              <a:t>📖 Definiciones y características</a:t>
             </a:r>
           </a:p>
         </p:txBody>
@@ -4428,97 +5164,97 @@
                   <a:srgbClr val="22282E"/>
                 </a:solidFill>
               </a:rPr>
-              <a:t>•  Triage e identificación: revisa la alerta, clasifica severidad (clase 202) y define el alcance inicial. Decide aislar por red preservando RAM (clase 216).</a:t>
-            </a:r>
-          </a:p>
-          <a:p>
-            <a:pPr>
-              <a:spcAft>
-                <a:spcPts val="600"/>
-              </a:spcAft>
-            </a:pPr>
-            <a:r>
-              <a:rPr sz="1500">
-                <a:solidFill>
-                  <a:srgbClr val="22282E"/>
-                </a:solidFill>
-              </a:rPr>
-              <a:t>•  Adquisición:</a:t>
-            </a:r>
-          </a:p>
-          <a:p>
-            <a:pPr>
-              <a:spcAft>
-                <a:spcPts val="600"/>
-              </a:spcAft>
-            </a:pPr>
-            <a:r>
-              <a:rPr sz="1500">
-                <a:solidFill>
-                  <a:srgbClr val="22282E"/>
-                </a:solidFill>
-              </a:rPr>
-              <a:t>•  Volca la RAM (WinPmem) y el disco (FTK Imager → E01), con hashes y cadena de custodia (clases 201, 203, 207).</a:t>
-            </a:r>
-          </a:p>
-          <a:p>
-            <a:pPr>
-              <a:spcAft>
-                <a:spcPts val="600"/>
-              </a:spcAft>
-            </a:pPr>
-            <a:r>
-              <a:rPr sz="1500">
-                <a:solidFill>
-                  <a:srgbClr val="22282E"/>
-                </a:solidFill>
-              </a:rPr>
-              <a:t>•  Captura tráfico si el atacante sigue activo (clase 208).</a:t>
-            </a:r>
-          </a:p>
-          <a:p>
-            <a:pPr>
-              <a:spcAft>
-                <a:spcPts val="600"/>
-              </a:spcAft>
-            </a:pPr>
-            <a:r>
-              <a:rPr sz="1500">
-                <a:solidFill>
-                  <a:srgbClr val="22282E"/>
-                </a:solidFill>
-              </a:rPr>
-              <a:t>•  Análisis de memoria: con Volatility 3 halla el proceso malicioso, su inyección y su conexión C2:</a:t>
-            </a:r>
-          </a:p>
-          <a:p>
-            <a:pPr>
-              <a:spcAft>
-                <a:spcPts val="600"/>
-              </a:spcAft>
-            </a:pPr>
-            <a:r>
-              <a:rPr sz="1500">
-                <a:solidFill>
-                  <a:srgbClr val="22282E"/>
-                </a:solidFill>
-              </a:rPr>
-              <a:t>•  vol -f memoria.raw windows.malfind</a:t>
-            </a:r>
-          </a:p>
-          <a:p>
-            <a:pPr>
-              <a:spcAft>
-                <a:spcPts val="600"/>
-              </a:spcAft>
-            </a:pPr>
-            <a:r>
-              <a:rPr sz="1500">
-                <a:solidFill>
-                  <a:srgbClr val="22282E"/>
-                </a:solidFill>
-              </a:rPr>
-              <a:t>•  vol -f memoria.raw windows.netscan</a:t>
+              <a:t>•  Capstone: proyecto integrador que ejercita todas las competencias. Característica: evalúa el criterio, no solo la técnica.</a:t>
+            </a:r>
+          </a:p>
+          <a:p>
+            <a:pPr>
+              <a:spcAft>
+                <a:spcPts val="600"/>
+              </a:spcAft>
+            </a:pPr>
+            <a:r>
+              <a:rPr sz="1500">
+                <a:solidFill>
+                  <a:srgbClr val="22282E"/>
+                </a:solidFill>
+              </a:rPr>
+              <a:t>•  Triage: evaluación rápida para priorizar y decidir. Característica: define el rumbo con información incompleta.</a:t>
+            </a:r>
+          </a:p>
+          <a:p>
+            <a:pPr>
+              <a:spcAft>
+                <a:spcPts val="600"/>
+              </a:spcAft>
+            </a:pPr>
+            <a:r>
+              <a:rPr sz="1500">
+                <a:solidFill>
+                  <a:srgbClr val="22282E"/>
+                </a:solidFill>
+              </a:rPr>
+              <a:t>•  Correlación multi-fuente: relacionar disco, memoria, red, identidad y otros registros. Característica: cada fuente puede confirmar, refutar, limitar o no observar una hipótesis.</a:t>
+            </a:r>
+          </a:p>
+          <a:p>
+            <a:pPr>
+              <a:spcAft>
+                <a:spcPts val="600"/>
+              </a:spcAft>
+            </a:pPr>
+            <a:r>
+              <a:rPr sz="1500">
+                <a:solidFill>
+                  <a:srgbClr val="22282E"/>
+                </a:solidFill>
+              </a:rPr>
+              <a:t>•  Narrativa del incidente: explicación cronológica y causal sustentada en evidencia e inferencias declaradas. Característica: incluye alternativas, vacíos y nivel de confianza.</a:t>
+            </a:r>
+          </a:p>
+          <a:p>
+            <a:pPr>
+              <a:spcAft>
+                <a:spcPts val="600"/>
+              </a:spcAft>
+            </a:pPr>
+            <a:r>
+              <a:rPr sz="1500">
+                <a:solidFill>
+                  <a:srgbClr val="22282E"/>
+                </a:solidFill>
+              </a:rPr>
+              <a:t>•  IOC/IOA: indicadores de compromiso/ataque. Característica: alimentan detección y búsqueda retroactiva.</a:t>
+            </a:r>
+          </a:p>
+          <a:p>
+            <a:pPr>
+              <a:spcAft>
+                <a:spcPts val="600"/>
+              </a:spcAft>
+            </a:pPr>
+            <a:r>
+              <a:rPr sz="1500">
+                <a:solidFill>
+                  <a:srgbClr val="22282E"/>
+                </a:solidFill>
+              </a:rPr>
+              <a:t>•  Contención con preservación: frenar sin destruir evidencia. Característica: el equilibrio central de DFIR.</a:t>
+            </a:r>
+          </a:p>
+          <a:p>
+            <a:pPr>
+              <a:spcAft>
+                <a:spcPts val="600"/>
+              </a:spcAft>
+            </a:pPr>
+            <a:r>
+              <a:rPr sz="1500">
+                <a:solidFill>
+                  <a:srgbClr val="22282E"/>
+                </a:solidFill>
+              </a:rPr>
+              <a:t>•  Cierre: decisión formal basada en criterios operativos, evidencia y riesgo residual aceptado. Característica: no implica conocimiento absoluto ni final automático de todas las mejoras.</a:t>
             </a:r>
           </a:p>
         </p:txBody>
@@ -4569,7 +5305,7 @@
                   <a:srgbClr val="0B3D2E"/>
                 </a:solidFill>
               </a:rPr>
-              <a:t>✍️ Ejercicios</a:t>
+              <a:t>🔍 Caso razonado — identidad comprometida, descarga y movimiento lateral</a:t>
             </a:r>
           </a:p>
         </p:txBody>
@@ -4607,82 +5343,37 @@
                   <a:srgbClr val="22282E"/>
                 </a:solidFill>
               </a:rPr>
-              <a:t>•  Escribe la decisión de triage y su justificación de severidad.</a:t>
-            </a:r>
-          </a:p>
-          <a:p>
-            <a:pPr>
-              <a:spcAft>
-                <a:spcPts val="600"/>
-              </a:spcAft>
-            </a:pPr>
-            <a:r>
-              <a:rPr sz="1500">
-                <a:solidFill>
-                  <a:srgbClr val="22282E"/>
-                </a:solidFill>
-              </a:rPr>
-              <a:t>•  Correlaciona un hallazgo de memoria con uno de disco y uno de red.</a:t>
-            </a:r>
-          </a:p>
-          <a:p>
-            <a:pPr>
-              <a:spcAft>
-                <a:spcPts val="600"/>
-              </a:spcAft>
-            </a:pPr>
-            <a:r>
-              <a:rPr sz="1500">
-                <a:solidFill>
-                  <a:srgbClr val="22282E"/>
-                </a:solidFill>
-              </a:rPr>
-              <a:t>•  Construye la timeline maestra con al menos ocho eventos.</a:t>
-            </a:r>
-          </a:p>
-          <a:p>
-            <a:pPr>
-              <a:spcAft>
-                <a:spcPts val="600"/>
-              </a:spcAft>
-            </a:pPr>
-            <a:r>
-              <a:rPr sz="1500">
-                <a:solidFill>
-                  <a:srgbClr val="22282E"/>
-                </a:solidFill>
-              </a:rPr>
-              <a:t>•  Enumera toda la persistencia del atacante en el caso.</a:t>
-            </a:r>
-          </a:p>
-          <a:p>
-            <a:pPr>
-              <a:spcAft>
-                <a:spcPts val="600"/>
-              </a:spcAft>
-            </a:pPr>
-            <a:r>
-              <a:rPr sz="1500">
-                <a:solidFill>
-                  <a:srgbClr val="22282E"/>
-                </a:solidFill>
-              </a:rPr>
-              <a:t>•  Deriva cinco IOCs del incidente para búsqueda retroactiva.</a:t>
-            </a:r>
-          </a:p>
-          <a:p>
-            <a:pPr>
-              <a:spcAft>
-                <a:spcPts val="600"/>
-              </a:spcAft>
-            </a:pPr>
-            <a:r>
-              <a:rPr sz="1500">
-                <a:solidFill>
-                  <a:srgbClr val="22282E"/>
-                </a:solidFill>
-              </a:rPr>
-              <a:t>•  Formula tres acciones correctivas contra causas raíz.</a:t>
+              <a:t>•  Una alerta detecta PowerShell en una estación financiera. La memoria muestra un proceso con conexión externa; el PCAP conserva una descarga, y el navegador relaciona la URL con un correo. Una…</a:t>
+            </a:r>
+          </a:p>
+          <a:p>
+            <a:pPr>
+              <a:spcAft>
+                <a:spcPts val="600"/>
+              </a:spcAft>
+            </a:pPr>
+            <a:r>
+              <a:rPr sz="1500">
+                <a:solidFill>
+                  <a:srgbClr val="22282E"/>
+                </a:solidFill>
+              </a:rPr>
+              <a:t>•  El equipo preserva memoria, PCAP, perfil, eventos Windows, autenticación y logs cloud. La timeline corrige desfase y separa descarga de ejecución. Aísla la estación, revoca sesiones y segmenta el…</a:t>
+            </a:r>
+          </a:p>
+          <a:p>
+            <a:pPr>
+              <a:spcAft>
+                <a:spcPts val="600"/>
+              </a:spcAft>
+            </a:pPr>
+            <a:r>
+              <a:rPr sz="1500">
+                <a:solidFill>
+                  <a:srgbClr val="22282E"/>
+                </a:solidFill>
+              </a:rPr>
+              <a:t>•  El RCA encuentra privilegio excesivo y telemetría cloud incompleta como condiciones contribuyentes. Las acciones incluyen privilegio temporal, habilitación de data events relevantes y prueba de una…</a:t>
             </a:r>
           </a:p>
         </p:txBody>
@@ -4733,7 +5424,7 @@
                   <a:srgbClr val="0B3D2E"/>
                 </a:solidFill>
               </a:rPr>
-              <a:t>📝 Reto verificable</a:t>
+              <a:t>✅ Criterio de dominio</a:t>
             </a:r>
           </a:p>
         </p:txBody>
@@ -4771,22 +5462,7 @@
                   <a:srgbClr val="22282E"/>
                 </a:solidFill>
               </a:rPr>
-              <a:t>•  Resuelve el incidente completo y entrega el paquete final: cadena de custodia, hallazgos de memoria/disco/red correlacionados, timeline maestra, plan de contención/erradicación ejecutado, RCA e informe forense con versión ejecutiva.</a:t>
-            </a:r>
-          </a:p>
-          <a:p>
-            <a:pPr>
-              <a:spcAft>
-                <a:spcPts val="600"/>
-              </a:spcAft>
-            </a:pPr>
-            <a:r>
-              <a:rPr sz="1500">
-                <a:solidFill>
-                  <a:srgbClr val="22282E"/>
-                </a:solidFill>
-              </a:rPr>
-              <a:t>•  Criterio de aceptación: la narrativa del ataque está respaldada por evidencia de las tres fuentes (memoria, disco, red) que concuerdan entre sí; la timeline maestra tiene al menos ocho eventos fechados en UTC; el informe permite reproducir el análisis; y las acciones correctivas atacan causas raíz, no síntomas.</a:t>
+              <a:t>•  Dominas la Parte 9 cuando puedes conducir el caso desde una alerta incierta hasta un cierre defendible: formulas hipótesis competidoras, preservas por volatilidad y riesgo, mantienes custodia y…</a:t>
             </a:r>
           </a:p>
         </p:txBody>
